--- a/examples/ppt/tables/tables-basic.pptx
+++ b/examples/ppt/tables/tables-basic.pptx
@@ -5,9 +5,11 @@
     <p:sldMasterId xmlns:r="http://schemas.openxmlformats.org/officeDocument/2006/relationships" id="2147483648" r:id="rId1"/>
   </p:sldMasterIdLst>
   <p:sldIdLst>
-    <p:sldId id="256" r:id="R6c80a4ef9dd14019"/>
-    <p:sldId id="257" r:id="R1de02248595a4fd4"/>
-    <p:sldId id="258" r:id="R57b42c7135c444dd"/>
+    <p:sldId id="256" r:id="R9486b9dfe21745e9"/>
+    <p:sldId id="257" r:id="R254ecd524ddb4a06"/>
+    <p:sldId id="258" r:id="Rc39d37dfe9dd44b4"/>
+    <p:sldId id="259" r:id="R5d3018eb619f4639"/>
+    <p:sldId id="260" r:id="R6b3ca158bb5b4a0d"/>
   </p:sldIdLst>
   <p:sldSz cx="12192000" cy="6858000"/>
   <p:notesSz cx="6858000" cy="9144000"/>
@@ -282,7 +284,7 @@
 </file>
 
 <file path=ppt/slideMasters/slideMaster1.xml><?xml version="1.0" encoding="utf-8"?>
-<p:sldMaster xmlns:r="http://schemas.openxmlformats.org/officeDocument/2006/relationships" xmlns:p="http://schemas.openxmlformats.org/presentationml/2006/main">
+<p:sldMaster xmlns:p="http://schemas.openxmlformats.org/presentationml/2006/main">
   <p:cSld>
     <p:spTree>
       <p:nvGrpSpPr>
@@ -305,7 +307,7 @@
 </file>
 
 <file path=ppt/slides/slide1.xml><?xml version="1.0" encoding="utf-8"?>
-<p:sld xmlns:a="http://schemas.openxmlformats.org/drawingml/2006/main" xmlns:p="http://schemas.openxmlformats.org/presentationml/2006/main">
+<p:sld xmlns:p="http://schemas.openxmlformats.org/presentationml/2006/main">
   <p:cSld>
     <p:spTree>
       <p:nvGrpSpPr>
@@ -316,8 +318,8 @@
       <p:grpSpPr/>
       <p:sp>
         <p:nvSpPr>
-          <p:cNvPr id="10000" name="TextBox 1"/>
-          <p:cNvSpPr/>
+          <p:cNvPr id="100000" name="TextBox 1"/>
+          <p:cNvSpPr txBox="1"/>
           <p:nvPr/>
         </p:nvSpPr>
         <p:spPr>
@@ -328,11 +330,6 @@
           <a:prstGeom xmlns:a="http://schemas.openxmlformats.org/drawingml/2006/main" prst="rect">
             <a:avLst/>
           </a:prstGeom>
-          <a:ln xmlns:a="http://schemas.openxmlformats.org/drawingml/2006/main" w="9525">
-            <a:solidFill>
-              <a:srgbClr val="595959"/>
-            </a:solidFill>
-          </a:ln>
         </p:spPr>
         <p:txBody>
           <a:bodyPr xmlns:a="http://schemas.openxmlformats.org/drawingml/2006/main"/>
@@ -347,7 +344,7 @@
       </p:sp>
       <p:graphicFrame>
         <p:nvGraphicFramePr>
-          <p:cNvPr id="10001" name="Table 1"/>
+          <p:cNvPr id="100001" name="Table 1"/>
           <p:cNvGraphicFramePr/>
           <p:nvPr/>
         </p:nvGraphicFramePr>
@@ -724,7 +721,7 @@
 </file>
 
 <file path=ppt/slides/slide2.xml><?xml version="1.0" encoding="utf-8"?>
-<p:sld xmlns:a="http://schemas.openxmlformats.org/drawingml/2006/main" xmlns:p="http://schemas.openxmlformats.org/presentationml/2006/main">
+<p:sld xmlns:p="http://schemas.openxmlformats.org/presentationml/2006/main">
   <p:cSld>
     <p:spTree>
       <p:nvGrpSpPr>
@@ -735,8 +732,8 @@
       <p:grpSpPr/>
       <p:sp>
         <p:nvSpPr>
-          <p:cNvPr id="10002" name="TextBox 1"/>
-          <p:cNvSpPr/>
+          <p:cNvPr id="100002" name="TextBox 1"/>
+          <p:cNvSpPr txBox="1"/>
           <p:nvPr/>
         </p:nvSpPr>
         <p:spPr>
@@ -747,11 +744,6 @@
           <a:prstGeom xmlns:a="http://schemas.openxmlformats.org/drawingml/2006/main" prst="rect">
             <a:avLst/>
           </a:prstGeom>
-          <a:ln xmlns:a="http://schemas.openxmlformats.org/drawingml/2006/main" w="9525">
-            <a:solidFill>
-              <a:srgbClr val="595959"/>
-            </a:solidFill>
-          </a:ln>
         </p:spPr>
         <p:txBody>
           <a:bodyPr xmlns:a="http://schemas.openxmlformats.org/drawingml/2006/main"/>
@@ -766,7 +758,7 @@
       </p:sp>
       <p:graphicFrame>
         <p:nvGraphicFramePr>
-          <p:cNvPr id="10003" name="Table 1"/>
+          <p:cNvPr id="100003" name="Table 1"/>
           <p:cNvGraphicFramePr/>
           <p:nvPr/>
         </p:nvGraphicFramePr>
@@ -981,7 +973,7 @@
 </file>
 
 <file path=ppt/slides/slide3.xml><?xml version="1.0" encoding="utf-8"?>
-<p:sld xmlns:a="http://schemas.openxmlformats.org/drawingml/2006/main" xmlns:p="http://schemas.openxmlformats.org/presentationml/2006/main">
+<p:sld xmlns:p="http://schemas.openxmlformats.org/presentationml/2006/main">
   <p:cSld>
     <p:spTree>
       <p:nvGrpSpPr>
@@ -992,8 +984,8 @@
       <p:grpSpPr/>
       <p:sp>
         <p:nvSpPr>
-          <p:cNvPr id="10004" name="TextBox 1"/>
-          <p:cNvSpPr/>
+          <p:cNvPr id="100004" name="TextBox 1"/>
+          <p:cNvSpPr txBox="1"/>
           <p:nvPr/>
         </p:nvSpPr>
         <p:spPr>
@@ -1004,11 +996,6 @@
           <a:prstGeom xmlns:a="http://schemas.openxmlformats.org/drawingml/2006/main" prst="rect">
             <a:avLst/>
           </a:prstGeom>
-          <a:ln xmlns:a="http://schemas.openxmlformats.org/drawingml/2006/main" w="9525">
-            <a:solidFill>
-              <a:srgbClr val="595959"/>
-            </a:solidFill>
-          </a:ln>
         </p:spPr>
         <p:txBody>
           <a:bodyPr xmlns:a="http://schemas.openxmlformats.org/drawingml/2006/main"/>
@@ -1023,7 +1010,7 @@
       </p:sp>
       <p:graphicFrame>
         <p:nvGraphicFramePr>
-          <p:cNvPr id="10005" name="Table 1"/>
+          <p:cNvPr id="100005" name="Table 1"/>
           <p:cNvGraphicFramePr/>
           <p:nvPr/>
         </p:nvGraphicFramePr>
@@ -1459,8 +1446,8 @@
       </p:graphicFrame>
       <p:sp>
         <p:nvSpPr>
-          <p:cNvPr id="10006" name="TextBox 2"/>
-          <p:cNvSpPr/>
+          <p:cNvPr id="100006" name="TextBox 2"/>
+          <p:cNvSpPr txBox="1"/>
           <p:nvPr/>
         </p:nvSpPr>
         <p:spPr>
@@ -1471,11 +1458,6 @@
           <a:prstGeom xmlns:a="http://schemas.openxmlformats.org/drawingml/2006/main" prst="rect">
             <a:avLst/>
           </a:prstGeom>
-          <a:ln xmlns:a="http://schemas.openxmlformats.org/drawingml/2006/main" w="9525">
-            <a:solidFill>
-              <a:srgbClr val="595959"/>
-            </a:solidFill>
-          </a:ln>
         </p:spPr>
         <p:txBody>
           <a:bodyPr xmlns:a="http://schemas.openxmlformats.org/drawingml/2006/main"/>
@@ -1490,7 +1472,7 @@
       </p:sp>
       <p:graphicFrame>
         <p:nvGraphicFramePr>
-          <p:cNvPr id="10007" name="Table 2"/>
+          <p:cNvPr id="100007" name="Table 2"/>
           <p:cNvGraphicFramePr/>
           <p:nvPr/>
         </p:nvGraphicFramePr>
@@ -1587,6 +1569,1378 @@
                       <a:prstDash val="solid"/>
                     </a:lnB>
                     <a:noFill/>
+                  </a:tcPr>
+                </a:tc>
+              </a:tr>
+            </a:tbl>
+          </a:graphicData>
+        </a:graphic>
+      </p:graphicFrame>
+    </p:spTree>
+  </p:cSld>
+</p:sld>
+</file>
+
+<file path=ppt/slides/slide4.xml><?xml version="1.0" encoding="utf-8"?>
+<p:sld xmlns:p="http://schemas.openxmlformats.org/presentationml/2006/main">
+  <p:cSld>
+    <p:spTree>
+      <p:nvGrpSpPr>
+        <p:cNvPr id="1" name=""/>
+        <p:cNvGrpSpPr/>
+        <p:nvPr/>
+      </p:nvGrpSpPr>
+      <p:grpSpPr/>
+      <p:sp>
+        <p:nvSpPr>
+          <p:cNvPr id="100008" name="TextBox 1"/>
+          <p:cNvSpPr txBox="1"/>
+          <p:nvPr/>
+        </p:nvSpPr>
+        <p:spPr>
+          <a:xfrm xmlns:a="http://schemas.openxmlformats.org/drawingml/2006/main">
+            <a:off x="457200" y="274320"/>
+            <a:ext cx="11887200" cy="548640"/>
+          </a:xfrm>
+          <a:prstGeom xmlns:a="http://schemas.openxmlformats.org/drawingml/2006/main" prst="rect">
+            <a:avLst/>
+          </a:prstGeom>
+        </p:spPr>
+        <p:txBody>
+          <a:bodyPr xmlns:a="http://schemas.openxmlformats.org/drawingml/2006/main"/>
+          <a:lstStyle xmlns:a="http://schemas.openxmlformats.org/drawingml/2006/main"/>
+          <a:p xmlns:a="http://schemas.openxmlformats.org/drawingml/2006/main">
+            <a:r>
+              <a:rPr lang="en-US" sz="2400" b="1"/>
+              <a:t>Cell Typography — italic / underline / strike / font / wrap / spacing</a:t>
+            </a:r>
+          </a:p>
+        </p:txBody>
+      </p:sp>
+      <p:graphicFrame>
+        <p:nvGraphicFramePr>
+          <p:cNvPr id="100009" name="Table 1"/>
+          <p:cNvGraphicFramePr/>
+          <p:nvPr/>
+        </p:nvGraphicFramePr>
+        <p:xfrm>
+          <a:off xmlns:a="http://schemas.openxmlformats.org/drawingml/2006/main" x="457200" y="1005840"/>
+          <a:ext xmlns:a="http://schemas.openxmlformats.org/drawingml/2006/main" cx="11887200" cy="4572000"/>
+        </p:xfrm>
+        <a:graphic xmlns:a="http://schemas.openxmlformats.org/drawingml/2006/main">
+          <a:graphicData uri="http://schemas.openxmlformats.org/drawingml/2006/table">
+            <a:tbl>
+              <a:tblPr firstRow="1" bandRow="1">
+                <a:tableStyleId>{2D5ABB26-0587-4C30-8999-92F81FD0307C}</a:tableStyleId>
+              </a:tblPr>
+              <a:tblGrid>
+                <a:gridCol w="5943600"/>
+                <a:gridCol w="5943600"/>
+              </a:tblGrid>
+              <a:tr h="653142">
+                <a:tc>
+                  <a:txBody>
+                    <a:bodyPr/>
+                    <a:lstStyle/>
+                    <a:p>
+                      <a:r>
+                        <a:rPr lang="en-US" b="1">
+                          <a:solidFill>
+                            <a:srgbClr val="FFFFFF"/>
+                          </a:solidFill>
+                        </a:rPr>
+                        <a:t>Property</a:t>
+                      </a:r>
+                    </a:p>
+                  </a:txBody>
+                  <a:tcPr>
+                    <a:lnL w="12700">
+                      <a:solidFill>
+                        <a:srgbClr val="808080"/>
+                      </a:solidFill>
+                      <a:prstDash val="solid"/>
+                    </a:lnL>
+                    <a:lnR w="12700">
+                      <a:solidFill>
+                        <a:srgbClr val="808080"/>
+                      </a:solidFill>
+                      <a:prstDash val="solid"/>
+                    </a:lnR>
+                    <a:lnT w="12700">
+                      <a:solidFill>
+                        <a:srgbClr val="808080"/>
+                      </a:solidFill>
+                      <a:prstDash val="solid"/>
+                    </a:lnT>
+                    <a:lnB w="12700">
+                      <a:solidFill>
+                        <a:srgbClr val="808080"/>
+                      </a:solidFill>
+                      <a:prstDash val="solid"/>
+                    </a:lnB>
+                    <a:solidFill>
+                      <a:srgbClr val="2E75B6"/>
+                    </a:solidFill>
+                  </a:tcPr>
+                </a:tc>
+                <a:tc>
+                  <a:txBody>
+                    <a:bodyPr/>
+                    <a:lstStyle/>
+                    <a:p>
+                      <a:r>
+                        <a:rPr lang="en-US" b="1">
+                          <a:solidFill>
+                            <a:srgbClr val="FFFFFF"/>
+                          </a:solidFill>
+                        </a:rPr>
+                        <a:t>Example</a:t>
+                      </a:r>
+                    </a:p>
+                  </a:txBody>
+                  <a:tcPr>
+                    <a:lnL w="12700">
+                      <a:solidFill>
+                        <a:srgbClr val="808080"/>
+                      </a:solidFill>
+                      <a:prstDash val="solid"/>
+                    </a:lnL>
+                    <a:lnR w="12700">
+                      <a:solidFill>
+                        <a:srgbClr val="808080"/>
+                      </a:solidFill>
+                      <a:prstDash val="solid"/>
+                    </a:lnR>
+                    <a:lnT w="12700">
+                      <a:solidFill>
+                        <a:srgbClr val="808080"/>
+                      </a:solidFill>
+                      <a:prstDash val="solid"/>
+                    </a:lnT>
+                    <a:lnB w="12700">
+                      <a:solidFill>
+                        <a:srgbClr val="808080"/>
+                      </a:solidFill>
+                      <a:prstDash val="solid"/>
+                    </a:lnB>
+                    <a:solidFill>
+                      <a:srgbClr val="2E75B6"/>
+                    </a:solidFill>
+                  </a:tcPr>
+                </a:tc>
+              </a:tr>
+              <a:tr h="653142">
+                <a:tc>
+                  <a:txBody>
+                    <a:bodyPr/>
+                    <a:lstStyle/>
+                    <a:p>
+                      <a:r>
+                        <a:rPr lang="en-US"/>
+                        <a:t>italic=true</a:t>
+                      </a:r>
+                    </a:p>
+                  </a:txBody>
+                  <a:tcPr>
+                    <a:lnL w="12700">
+                      <a:solidFill>
+                        <a:srgbClr val="808080"/>
+                      </a:solidFill>
+                      <a:prstDash val="solid"/>
+                    </a:lnL>
+                    <a:lnR w="12700">
+                      <a:solidFill>
+                        <a:srgbClr val="808080"/>
+                      </a:solidFill>
+                      <a:prstDash val="solid"/>
+                    </a:lnR>
+                    <a:lnT w="12700">
+                      <a:solidFill>
+                        <a:srgbClr val="808080"/>
+                      </a:solidFill>
+                      <a:prstDash val="solid"/>
+                    </a:lnT>
+                    <a:lnB w="12700">
+                      <a:solidFill>
+                        <a:srgbClr val="808080"/>
+                      </a:solidFill>
+                      <a:prstDash val="solid"/>
+                    </a:lnB>
+                  </a:tcPr>
+                </a:tc>
+                <a:tc>
+                  <a:txBody>
+                    <a:bodyPr/>
+                    <a:lstStyle/>
+                    <a:p>
+                      <a:r>
+                        <a:rPr lang="en-US" i="1"/>
+                        <a:t>This cell text is italic.</a:t>
+                      </a:r>
+                    </a:p>
+                  </a:txBody>
+                  <a:tcPr>
+                    <a:lnL w="12700">
+                      <a:solidFill>
+                        <a:srgbClr val="808080"/>
+                      </a:solidFill>
+                      <a:prstDash val="solid"/>
+                    </a:lnL>
+                    <a:lnR w="12700">
+                      <a:solidFill>
+                        <a:srgbClr val="808080"/>
+                      </a:solidFill>
+                      <a:prstDash val="solid"/>
+                    </a:lnR>
+                    <a:lnT w="12700">
+                      <a:solidFill>
+                        <a:srgbClr val="808080"/>
+                      </a:solidFill>
+                      <a:prstDash val="solid"/>
+                    </a:lnT>
+                    <a:lnB w="12700">
+                      <a:solidFill>
+                        <a:srgbClr val="808080"/>
+                      </a:solidFill>
+                      <a:prstDash val="solid"/>
+                    </a:lnB>
+                  </a:tcPr>
+                </a:tc>
+              </a:tr>
+              <a:tr h="653142">
+                <a:tc>
+                  <a:txBody>
+                    <a:bodyPr/>
+                    <a:lstStyle/>
+                    <a:p>
+                      <a:r>
+                        <a:rPr lang="en-US"/>
+                        <a:t>underline=single</a:t>
+                      </a:r>
+                    </a:p>
+                  </a:txBody>
+                  <a:tcPr>
+                    <a:lnL w="12700">
+                      <a:solidFill>
+                        <a:srgbClr val="808080"/>
+                      </a:solidFill>
+                      <a:prstDash val="solid"/>
+                    </a:lnL>
+                    <a:lnR w="12700">
+                      <a:solidFill>
+                        <a:srgbClr val="808080"/>
+                      </a:solidFill>
+                      <a:prstDash val="solid"/>
+                    </a:lnR>
+                    <a:lnT w="12700">
+                      <a:solidFill>
+                        <a:srgbClr val="808080"/>
+                      </a:solidFill>
+                      <a:prstDash val="solid"/>
+                    </a:lnT>
+                    <a:lnB w="12700">
+                      <a:solidFill>
+                        <a:srgbClr val="808080"/>
+                      </a:solidFill>
+                      <a:prstDash val="solid"/>
+                    </a:lnB>
+                  </a:tcPr>
+                </a:tc>
+                <a:tc>
+                  <a:txBody>
+                    <a:bodyPr/>
+                    <a:lstStyle/>
+                    <a:p>
+                      <a:r>
+                        <a:rPr lang="en-US" u="sng"/>
+                        <a:t>This cell text is underlined.</a:t>
+                      </a:r>
+                    </a:p>
+                  </a:txBody>
+                  <a:tcPr>
+                    <a:lnL w="12700">
+                      <a:solidFill>
+                        <a:srgbClr val="808080"/>
+                      </a:solidFill>
+                      <a:prstDash val="solid"/>
+                    </a:lnL>
+                    <a:lnR w="12700">
+                      <a:solidFill>
+                        <a:srgbClr val="808080"/>
+                      </a:solidFill>
+                      <a:prstDash val="solid"/>
+                    </a:lnR>
+                    <a:lnT w="12700">
+                      <a:solidFill>
+                        <a:srgbClr val="808080"/>
+                      </a:solidFill>
+                      <a:prstDash val="solid"/>
+                    </a:lnT>
+                    <a:lnB w="12700">
+                      <a:solidFill>
+                        <a:srgbClr val="808080"/>
+                      </a:solidFill>
+                      <a:prstDash val="solid"/>
+                    </a:lnB>
+                  </a:tcPr>
+                </a:tc>
+              </a:tr>
+              <a:tr h="653142">
+                <a:tc>
+                  <a:txBody>
+                    <a:bodyPr/>
+                    <a:lstStyle/>
+                    <a:p>
+                      <a:r>
+                        <a:rPr lang="en-US"/>
+                        <a:t>strike=single</a:t>
+                      </a:r>
+                    </a:p>
+                  </a:txBody>
+                  <a:tcPr>
+                    <a:lnL w="12700">
+                      <a:solidFill>
+                        <a:srgbClr val="808080"/>
+                      </a:solidFill>
+                      <a:prstDash val="solid"/>
+                    </a:lnL>
+                    <a:lnR w="12700">
+                      <a:solidFill>
+                        <a:srgbClr val="808080"/>
+                      </a:solidFill>
+                      <a:prstDash val="solid"/>
+                    </a:lnR>
+                    <a:lnT w="12700">
+                      <a:solidFill>
+                        <a:srgbClr val="808080"/>
+                      </a:solidFill>
+                      <a:prstDash val="solid"/>
+                    </a:lnT>
+                    <a:lnB w="12700">
+                      <a:solidFill>
+                        <a:srgbClr val="808080"/>
+                      </a:solidFill>
+                      <a:prstDash val="solid"/>
+                    </a:lnB>
+                  </a:tcPr>
+                </a:tc>
+                <a:tc>
+                  <a:txBody>
+                    <a:bodyPr/>
+                    <a:lstStyle/>
+                    <a:p>
+                      <a:r>
+                        <a:rPr lang="en-US" strike="sngStrike"/>
+                        <a:t>This cell text has strikethrough.</a:t>
+                      </a:r>
+                    </a:p>
+                  </a:txBody>
+                  <a:tcPr>
+                    <a:lnL w="12700">
+                      <a:solidFill>
+                        <a:srgbClr val="808080"/>
+                      </a:solidFill>
+                      <a:prstDash val="solid"/>
+                    </a:lnL>
+                    <a:lnR w="12700">
+                      <a:solidFill>
+                        <a:srgbClr val="808080"/>
+                      </a:solidFill>
+                      <a:prstDash val="solid"/>
+                    </a:lnR>
+                    <a:lnT w="12700">
+                      <a:solidFill>
+                        <a:srgbClr val="808080"/>
+                      </a:solidFill>
+                      <a:prstDash val="solid"/>
+                    </a:lnT>
+                    <a:lnB w="12700">
+                      <a:solidFill>
+                        <a:srgbClr val="808080"/>
+                      </a:solidFill>
+                      <a:prstDash val="solid"/>
+                    </a:lnB>
+                  </a:tcPr>
+                </a:tc>
+              </a:tr>
+              <a:tr h="653142">
+                <a:tc>
+                  <a:txBody>
+                    <a:bodyPr/>
+                    <a:lstStyle/>
+                    <a:p>
+                      <a:r>
+                        <a:rPr lang="en-US"/>
+                        <a:t>font=Georgia</a:t>
+                      </a:r>
+                    </a:p>
+                  </a:txBody>
+                  <a:tcPr>
+                    <a:lnL w="12700">
+                      <a:solidFill>
+                        <a:srgbClr val="808080"/>
+                      </a:solidFill>
+                      <a:prstDash val="solid"/>
+                    </a:lnL>
+                    <a:lnR w="12700">
+                      <a:solidFill>
+                        <a:srgbClr val="808080"/>
+                      </a:solidFill>
+                      <a:prstDash val="solid"/>
+                    </a:lnR>
+                    <a:lnT w="12700">
+                      <a:solidFill>
+                        <a:srgbClr val="808080"/>
+                      </a:solidFill>
+                      <a:prstDash val="solid"/>
+                    </a:lnT>
+                    <a:lnB w="12700">
+                      <a:solidFill>
+                        <a:srgbClr val="808080"/>
+                      </a:solidFill>
+                      <a:prstDash val="solid"/>
+                    </a:lnB>
+                  </a:tcPr>
+                </a:tc>
+                <a:tc>
+                  <a:txBody>
+                    <a:bodyPr/>
+                    <a:lstStyle/>
+                    <a:p>
+                      <a:r>
+                        <a:rPr lang="en-US" sz="1600">
+                          <a:latin typeface="Georgia"/>
+                          <a:ea typeface="Georgia"/>
+                        </a:rPr>
+                        <a:t>This cell uses Georgia.</a:t>
+                      </a:r>
+                    </a:p>
+                  </a:txBody>
+                  <a:tcPr>
+                    <a:lnL w="12700">
+                      <a:solidFill>
+                        <a:srgbClr val="808080"/>
+                      </a:solidFill>
+                      <a:prstDash val="solid"/>
+                    </a:lnL>
+                    <a:lnR w="12700">
+                      <a:solidFill>
+                        <a:srgbClr val="808080"/>
+                      </a:solidFill>
+                      <a:prstDash val="solid"/>
+                    </a:lnR>
+                    <a:lnT w="12700">
+                      <a:solidFill>
+                        <a:srgbClr val="808080"/>
+                      </a:solidFill>
+                      <a:prstDash val="solid"/>
+                    </a:lnT>
+                    <a:lnB w="12700">
+                      <a:solidFill>
+                        <a:srgbClr val="808080"/>
+                      </a:solidFill>
+                      <a:prstDash val="solid"/>
+                    </a:lnB>
+                  </a:tcPr>
+                </a:tc>
+              </a:tr>
+              <a:tr h="653142">
+                <a:tc>
+                  <a:txBody>
+                    <a:bodyPr/>
+                    <a:lstStyle/>
+                    <a:p>
+                      <a:r>
+                        <a:rPr lang="en-US"/>
+                        <a:t>wrap=false</a:t>
+                      </a:r>
+                    </a:p>
+                  </a:txBody>
+                  <a:tcPr>
+                    <a:lnL w="12700">
+                      <a:solidFill>
+                        <a:srgbClr val="808080"/>
+                      </a:solidFill>
+                      <a:prstDash val="solid"/>
+                    </a:lnL>
+                    <a:lnR w="12700">
+                      <a:solidFill>
+                        <a:srgbClr val="808080"/>
+                      </a:solidFill>
+                      <a:prstDash val="solid"/>
+                    </a:lnR>
+                    <a:lnT w="12700">
+                      <a:solidFill>
+                        <a:srgbClr val="808080"/>
+                      </a:solidFill>
+                      <a:prstDash val="solid"/>
+                    </a:lnT>
+                    <a:lnB w="12700">
+                      <a:solidFill>
+                        <a:srgbClr val="808080"/>
+                      </a:solidFill>
+                      <a:prstDash val="solid"/>
+                    </a:lnB>
+                  </a:tcPr>
+                </a:tc>
+                <a:tc>
+                  <a:txBody>
+                    <a:bodyPr wrap="none"/>
+                    <a:lstStyle/>
+                    <a:p>
+                      <a:r>
+                        <a:rPr lang="en-US"/>
+                        <a:t>This is a long sentence that will not wrap because wrap is disabled — it just runs off the edge.</a:t>
+                      </a:r>
+                    </a:p>
+                  </a:txBody>
+                  <a:tcPr>
+                    <a:lnL w="12700">
+                      <a:solidFill>
+                        <a:srgbClr val="808080"/>
+                      </a:solidFill>
+                      <a:prstDash val="solid"/>
+                    </a:lnL>
+                    <a:lnR w="12700">
+                      <a:solidFill>
+                        <a:srgbClr val="808080"/>
+                      </a:solidFill>
+                      <a:prstDash val="solid"/>
+                    </a:lnR>
+                    <a:lnT w="12700">
+                      <a:solidFill>
+                        <a:srgbClr val="808080"/>
+                      </a:solidFill>
+                      <a:prstDash val="solid"/>
+                    </a:lnT>
+                    <a:lnB w="12700">
+                      <a:solidFill>
+                        <a:srgbClr val="808080"/>
+                      </a:solidFill>
+                      <a:prstDash val="solid"/>
+                    </a:lnB>
+                  </a:tcPr>
+                </a:tc>
+              </a:tr>
+              <a:tr h="653142">
+                <a:tc>
+                  <a:txBody>
+                    <a:bodyPr/>
+                    <a:lstStyle/>
+                    <a:p>
+                      <a:r>
+                        <a:rPr lang="en-US"/>
+                        <a:t>linespacing=1.5x + spacebefore=4pt + spaceafter=4pt</a:t>
+                      </a:r>
+                    </a:p>
+                  </a:txBody>
+                  <a:tcPr>
+                    <a:lnL w="12700">
+                      <a:solidFill>
+                        <a:srgbClr val="808080"/>
+                      </a:solidFill>
+                      <a:prstDash val="solid"/>
+                    </a:lnL>
+                    <a:lnR w="12700">
+                      <a:solidFill>
+                        <a:srgbClr val="808080"/>
+                      </a:solidFill>
+                      <a:prstDash val="solid"/>
+                    </a:lnR>
+                    <a:lnT w="12700">
+                      <a:solidFill>
+                        <a:srgbClr val="808080"/>
+                      </a:solidFill>
+                      <a:prstDash val="solid"/>
+                    </a:lnT>
+                    <a:lnB w="12700">
+                      <a:solidFill>
+                        <a:srgbClr val="808080"/>
+                      </a:solidFill>
+                      <a:prstDash val="solid"/>
+                    </a:lnB>
+                  </a:tcPr>
+                </a:tc>
+                <a:tc>
+                  <a:txBody>
+                    <a:bodyPr/>
+                    <a:lstStyle/>
+                    <a:p>
+                      <a:pPr>
+                        <a:lnSpc>
+                          <a:spcPct val="150000"/>
+                        </a:lnSpc>
+                        <a:spcBef>
+                          <a:spcPts val="400"/>
+                        </a:spcBef>
+                        <a:spcAft>
+                          <a:spcPts val="400"/>
+                        </a:spcAft>
+                      </a:pPr>
+                      <a:r>
+                        <a:rPr lang="en-US"/>
+                        <a:t>Paragraph A</a:t>
+                      </a:r>
+                    </a:p>
+                  </a:txBody>
+                  <a:tcPr>
+                    <a:lnL w="12700">
+                      <a:solidFill>
+                        <a:srgbClr val="808080"/>
+                      </a:solidFill>
+                      <a:prstDash val="solid"/>
+                    </a:lnL>
+                    <a:lnR w="12700">
+                      <a:solidFill>
+                        <a:srgbClr val="808080"/>
+                      </a:solidFill>
+                      <a:prstDash val="solid"/>
+                    </a:lnR>
+                    <a:lnT w="12700">
+                      <a:solidFill>
+                        <a:srgbClr val="808080"/>
+                      </a:solidFill>
+                      <a:prstDash val="solid"/>
+                    </a:lnT>
+                    <a:lnB w="12700">
+                      <a:solidFill>
+                        <a:srgbClr val="808080"/>
+                      </a:solidFill>
+                      <a:prstDash val="solid"/>
+                    </a:lnB>
+                  </a:tcPr>
+                </a:tc>
+              </a:tr>
+            </a:tbl>
+          </a:graphicData>
+        </a:graphic>
+      </p:graphicFrame>
+    </p:spTree>
+  </p:cSld>
+</p:sld>
+</file>
+
+<file path=ppt/slides/slide5.xml><?xml version="1.0" encoding="utf-8"?>
+<p:sld xmlns:p="http://schemas.openxmlformats.org/presentationml/2006/main">
+  <p:cSld>
+    <p:spTree>
+      <p:nvGrpSpPr>
+        <p:cNvPr id="1" name=""/>
+        <p:cNvGrpSpPr/>
+        <p:nvPr/>
+      </p:nvGrpSpPr>
+      <p:grpSpPr/>
+      <p:sp>
+        <p:nvSpPr>
+          <p:cNvPr id="100010" name="TextBox 1"/>
+          <p:cNvSpPr txBox="1"/>
+          <p:nvPr/>
+        </p:nvSpPr>
+        <p:spPr>
+          <a:xfrm xmlns:a="http://schemas.openxmlformats.org/drawingml/2006/main">
+            <a:off x="457200" y="274320"/>
+            <a:ext cx="11887200" cy="548640"/>
+          </a:xfrm>
+          <a:prstGeom xmlns:a="http://schemas.openxmlformats.org/drawingml/2006/main" prst="rect">
+            <a:avLst/>
+          </a:prstGeom>
+        </p:spPr>
+        <p:txBody>
+          <a:bodyPr xmlns:a="http://schemas.openxmlformats.org/drawingml/2006/main"/>
+          <a:lstStyle xmlns:a="http://schemas.openxmlformats.org/drawingml/2006/main"/>
+          <a:p xmlns:a="http://schemas.openxmlformats.org/drawingml/2006/main">
+            <a:r>
+              <a:rPr lang="en-US" sz="2200" b="1"/>
+              <a:t>Cell Layout — padding / opacity / image / textdirection / merge.right / bevel</a:t>
+            </a:r>
+          </a:p>
+        </p:txBody>
+      </p:sp>
+      <p:graphicFrame>
+        <p:nvGraphicFramePr>
+          <p:cNvPr id="100011" name="Table 1"/>
+          <p:cNvGraphicFramePr/>
+          <p:nvPr/>
+        </p:nvGraphicFramePr>
+        <p:xfrm>
+          <a:off xmlns:a="http://schemas.openxmlformats.org/drawingml/2006/main" x="457200" y="1005840"/>
+          <a:ext xmlns:a="http://schemas.openxmlformats.org/drawingml/2006/main" cx="11887200" cy="5669280"/>
+        </p:xfrm>
+        <a:graphic xmlns:a="http://schemas.openxmlformats.org/drawingml/2006/main">
+          <a:graphicData uri="http://schemas.openxmlformats.org/drawingml/2006/table">
+            <a:tbl>
+              <a:tblPr firstRow="1" bandRow="1">
+                <a:tableStyleId>{2D5ABB26-0587-4C30-8999-92F81FD0307C}</a:tableStyleId>
+              </a:tblPr>
+              <a:tblGrid>
+                <a:gridCol w="5943600"/>
+                <a:gridCol w="5943600"/>
+              </a:tblGrid>
+              <a:tr h="708660">
+                <a:tc>
+                  <a:txBody>
+                    <a:bodyPr/>
+                    <a:lstStyle/>
+                    <a:p>
+                      <a:r>
+                        <a:rPr lang="en-US" b="1">
+                          <a:solidFill>
+                            <a:srgbClr val="FFFFFF"/>
+                          </a:solidFill>
+                        </a:rPr>
+                        <a:t>Property</a:t>
+                      </a:r>
+                    </a:p>
+                  </a:txBody>
+                  <a:tcPr>
+                    <a:lnL w="12700">
+                      <a:solidFill>
+                        <a:srgbClr val="808080"/>
+                      </a:solidFill>
+                      <a:prstDash val="solid"/>
+                    </a:lnL>
+                    <a:lnR w="12700">
+                      <a:solidFill>
+                        <a:srgbClr val="808080"/>
+                      </a:solidFill>
+                      <a:prstDash val="solid"/>
+                    </a:lnR>
+                    <a:lnT w="12700">
+                      <a:solidFill>
+                        <a:srgbClr val="808080"/>
+                      </a:solidFill>
+                      <a:prstDash val="solid"/>
+                    </a:lnT>
+                    <a:lnB w="12700">
+                      <a:solidFill>
+                        <a:srgbClr val="808080"/>
+                      </a:solidFill>
+                      <a:prstDash val="solid"/>
+                    </a:lnB>
+                    <a:solidFill>
+                      <a:srgbClr val="1F4E79"/>
+                    </a:solidFill>
+                  </a:tcPr>
+                </a:tc>
+                <a:tc>
+                  <a:txBody>
+                    <a:bodyPr/>
+                    <a:lstStyle/>
+                    <a:p>
+                      <a:r>
+                        <a:rPr lang="en-US" b="1">
+                          <a:solidFill>
+                            <a:srgbClr val="FFFFFF"/>
+                          </a:solidFill>
+                        </a:rPr>
+                        <a:t>Example</a:t>
+                      </a:r>
+                    </a:p>
+                  </a:txBody>
+                  <a:tcPr>
+                    <a:lnL w="12700">
+                      <a:solidFill>
+                        <a:srgbClr val="808080"/>
+                      </a:solidFill>
+                      <a:prstDash val="solid"/>
+                    </a:lnL>
+                    <a:lnR w="12700">
+                      <a:solidFill>
+                        <a:srgbClr val="808080"/>
+                      </a:solidFill>
+                      <a:prstDash val="solid"/>
+                    </a:lnR>
+                    <a:lnT w="12700">
+                      <a:solidFill>
+                        <a:srgbClr val="808080"/>
+                      </a:solidFill>
+                      <a:prstDash val="solid"/>
+                    </a:lnT>
+                    <a:lnB w="12700">
+                      <a:solidFill>
+                        <a:srgbClr val="808080"/>
+                      </a:solidFill>
+                      <a:prstDash val="solid"/>
+                    </a:lnB>
+                    <a:solidFill>
+                      <a:srgbClr val="1F4E79"/>
+                    </a:solidFill>
+                  </a:tcPr>
+                </a:tc>
+              </a:tr>
+              <a:tr h="708660">
+                <a:tc>
+                  <a:txBody>
+                    <a:bodyPr/>
+                    <a:lstStyle/>
+                    <a:p>
+                      <a:r>
+                        <a:rPr lang="en-US"/>
+                        <a:t>padding=0.25in</a:t>
+                      </a:r>
+                    </a:p>
+                  </a:txBody>
+                  <a:tcPr>
+                    <a:lnL w="12700">
+                      <a:solidFill>
+                        <a:srgbClr val="808080"/>
+                      </a:solidFill>
+                      <a:prstDash val="solid"/>
+                    </a:lnL>
+                    <a:lnR w="12700">
+                      <a:solidFill>
+                        <a:srgbClr val="808080"/>
+                      </a:solidFill>
+                      <a:prstDash val="solid"/>
+                    </a:lnR>
+                    <a:lnT w="12700">
+                      <a:solidFill>
+                        <a:srgbClr val="808080"/>
+                      </a:solidFill>
+                      <a:prstDash val="solid"/>
+                    </a:lnT>
+                    <a:lnB w="12700">
+                      <a:solidFill>
+                        <a:srgbClr val="808080"/>
+                      </a:solidFill>
+                      <a:prstDash val="solid"/>
+                    </a:lnB>
+                  </a:tcPr>
+                </a:tc>
+                <a:tc>
+                  <a:txBody>
+                    <a:bodyPr/>
+                    <a:lstStyle/>
+                    <a:p>
+                      <a:r>
+                        <a:rPr lang="en-US"/>
+                        <a:t>Large inner margin.</a:t>
+                      </a:r>
+                    </a:p>
+                  </a:txBody>
+                  <a:tcPr marL="228600" marR="228600" marT="228600" marB="228600">
+                    <a:lnL w="12700">
+                      <a:solidFill>
+                        <a:srgbClr val="808080"/>
+                      </a:solidFill>
+                      <a:prstDash val="solid"/>
+                    </a:lnL>
+                    <a:lnR w="12700">
+                      <a:solidFill>
+                        <a:srgbClr val="808080"/>
+                      </a:solidFill>
+                      <a:prstDash val="solid"/>
+                    </a:lnR>
+                    <a:lnT w="12700">
+                      <a:solidFill>
+                        <a:srgbClr val="808080"/>
+                      </a:solidFill>
+                      <a:prstDash val="solid"/>
+                    </a:lnT>
+                    <a:lnB w="12700">
+                      <a:solidFill>
+                        <a:srgbClr val="808080"/>
+                      </a:solidFill>
+                      <a:prstDash val="solid"/>
+                    </a:lnB>
+                    <a:solidFill>
+                      <a:srgbClr val="F1FAEE"/>
+                    </a:solidFill>
+                  </a:tcPr>
+                </a:tc>
+              </a:tr>
+              <a:tr h="708660">
+                <a:tc>
+                  <a:txBody>
+                    <a:bodyPr/>
+                    <a:lstStyle/>
+                    <a:p>
+                      <a:r>
+                        <a:rPr lang="en-US"/>
+                        <a:t>padding.bottom=0.3in</a:t>
+                      </a:r>
+                    </a:p>
+                  </a:txBody>
+                  <a:tcPr>
+                    <a:lnL w="12700">
+                      <a:solidFill>
+                        <a:srgbClr val="808080"/>
+                      </a:solidFill>
+                      <a:prstDash val="solid"/>
+                    </a:lnL>
+                    <a:lnR w="12700">
+                      <a:solidFill>
+                        <a:srgbClr val="808080"/>
+                      </a:solidFill>
+                      <a:prstDash val="solid"/>
+                    </a:lnR>
+                    <a:lnT w="12700">
+                      <a:solidFill>
+                        <a:srgbClr val="808080"/>
+                      </a:solidFill>
+                      <a:prstDash val="solid"/>
+                    </a:lnT>
+                    <a:lnB w="12700">
+                      <a:solidFill>
+                        <a:srgbClr val="808080"/>
+                      </a:solidFill>
+                      <a:prstDash val="solid"/>
+                    </a:lnB>
+                  </a:tcPr>
+                </a:tc>
+                <a:tc>
+                  <a:txBody>
+                    <a:bodyPr/>
+                    <a:lstStyle/>
+                    <a:p>
+                      <a:r>
+                        <a:rPr lang="en-US"/>
+                        <a:t>Extra space below this text.</a:t>
+                      </a:r>
+                    </a:p>
+                  </a:txBody>
+                  <a:tcPr marB="274320">
+                    <a:lnL w="12700">
+                      <a:solidFill>
+                        <a:srgbClr val="808080"/>
+                      </a:solidFill>
+                      <a:prstDash val="solid"/>
+                    </a:lnL>
+                    <a:lnR w="12700">
+                      <a:solidFill>
+                        <a:srgbClr val="808080"/>
+                      </a:solidFill>
+                      <a:prstDash val="solid"/>
+                    </a:lnR>
+                    <a:lnT w="12700">
+                      <a:solidFill>
+                        <a:srgbClr val="808080"/>
+                      </a:solidFill>
+                      <a:prstDash val="solid"/>
+                    </a:lnT>
+                    <a:lnB w="12700">
+                      <a:solidFill>
+                        <a:srgbClr val="808080"/>
+                      </a:solidFill>
+                      <a:prstDash val="solid"/>
+                    </a:lnB>
+                    <a:solidFill>
+                      <a:srgbClr val="F1FAEE"/>
+                    </a:solidFill>
+                  </a:tcPr>
+                </a:tc>
+              </a:tr>
+              <a:tr h="708660">
+                <a:tc>
+                  <a:txBody>
+                    <a:bodyPr/>
+                    <a:lstStyle/>
+                    <a:p>
+                      <a:r>
+                        <a:rPr lang="en-US"/>
+                        <a:t>opacity=0.4  (requires fill)</a:t>
+                      </a:r>
+                    </a:p>
+                  </a:txBody>
+                  <a:tcPr>
+                    <a:lnL w="12700">
+                      <a:solidFill>
+                        <a:srgbClr val="808080"/>
+                      </a:solidFill>
+                      <a:prstDash val="solid"/>
+                    </a:lnL>
+                    <a:lnR w="12700">
+                      <a:solidFill>
+                        <a:srgbClr val="808080"/>
+                      </a:solidFill>
+                      <a:prstDash val="solid"/>
+                    </a:lnR>
+                    <a:lnT w="12700">
+                      <a:solidFill>
+                        <a:srgbClr val="808080"/>
+                      </a:solidFill>
+                      <a:prstDash val="solid"/>
+                    </a:lnT>
+                    <a:lnB w="12700">
+                      <a:solidFill>
+                        <a:srgbClr val="808080"/>
+                      </a:solidFill>
+                      <a:prstDash val="solid"/>
+                    </a:lnB>
+                  </a:tcPr>
+                </a:tc>
+                <a:tc>
+                  <a:txBody>
+                    <a:bodyPr/>
+                    <a:lstStyle/>
+                    <a:p>
+                      <a:r>
+                        <a:rPr lang="en-US"/>
+                        <a:t>40% transparent fill.</a:t>
+                      </a:r>
+                    </a:p>
+                  </a:txBody>
+                  <a:tcPr>
+                    <a:lnL w="12700">
+                      <a:solidFill>
+                        <a:srgbClr val="808080"/>
+                      </a:solidFill>
+                      <a:prstDash val="solid"/>
+                    </a:lnL>
+                    <a:lnR w="12700">
+                      <a:solidFill>
+                        <a:srgbClr val="808080"/>
+                      </a:solidFill>
+                      <a:prstDash val="solid"/>
+                    </a:lnR>
+                    <a:lnT w="12700">
+                      <a:solidFill>
+                        <a:srgbClr val="808080"/>
+                      </a:solidFill>
+                      <a:prstDash val="solid"/>
+                    </a:lnT>
+                    <a:lnB w="12700">
+                      <a:solidFill>
+                        <a:srgbClr val="808080"/>
+                      </a:solidFill>
+                      <a:prstDash val="solid"/>
+                    </a:lnB>
+                    <a:solidFill>
+                      <a:srgbClr val="4472C4">
+                        <a:alpha val="40000"/>
+                      </a:srgbClr>
+                    </a:solidFill>
+                  </a:tcPr>
+                </a:tc>
+              </a:tr>
+              <a:tr h="708660">
+                <a:tc>
+                  <a:txBody>
+                    <a:bodyPr/>
+                    <a:lstStyle/>
+                    <a:p>
+                      <a:r>
+                        <a:rPr lang="en-US"/>
+                        <a:t>image=/path/to/img.png</a:t>
+                      </a:r>
+                    </a:p>
+                  </a:txBody>
+                  <a:tcPr>
+                    <a:lnL w="12700">
+                      <a:solidFill>
+                        <a:srgbClr val="808080"/>
+                      </a:solidFill>
+                      <a:prstDash val="solid"/>
+                    </a:lnL>
+                    <a:lnR w="12700">
+                      <a:solidFill>
+                        <a:srgbClr val="808080"/>
+                      </a:solidFill>
+                      <a:prstDash val="solid"/>
+                    </a:lnR>
+                    <a:lnT w="12700">
+                      <a:solidFill>
+                        <a:srgbClr val="808080"/>
+                      </a:solidFill>
+                      <a:prstDash val="solid"/>
+                    </a:lnT>
+                    <a:lnB w="12700">
+                      <a:solidFill>
+                        <a:srgbClr val="808080"/>
+                      </a:solidFill>
+                      <a:prstDash val="solid"/>
+                    </a:lnB>
+                  </a:tcPr>
+                </a:tc>
+                <a:tc>
+                  <a:txBody>
+                    <a:bodyPr/>
+                    <a:lstStyle/>
+                    <a:p>
+                      <a:endParaRPr lang="en-US"/>
+                    </a:p>
+                  </a:txBody>
+                  <a:tcPr>
+                    <a:lnL w="12700">
+                      <a:solidFill>
+                        <a:srgbClr val="808080"/>
+                      </a:solidFill>
+                      <a:prstDash val="solid"/>
+                    </a:lnL>
+                    <a:lnR w="12700">
+                      <a:solidFill>
+                        <a:srgbClr val="808080"/>
+                      </a:solidFill>
+                      <a:prstDash val="solid"/>
+                    </a:lnR>
+                    <a:lnT w="12700">
+                      <a:solidFill>
+                        <a:srgbClr val="808080"/>
+                      </a:solidFill>
+                      <a:prstDash val="solid"/>
+                    </a:lnT>
+                    <a:lnB w="12700">
+                      <a:solidFill>
+                        <a:srgbClr val="808080"/>
+                      </a:solidFill>
+                      <a:prstDash val="solid"/>
+                    </a:lnB>
+                    <a:blipFill>
+                      <a:blip xmlns:r="http://schemas.openxmlformats.org/officeDocument/2006/relationships" r:embed="Rad02716030684106"/>
+                      <a:stretch>
+                        <a:fillRect/>
+                      </a:stretch>
+                    </a:blipFill>
+                  </a:tcPr>
+                </a:tc>
+              </a:tr>
+              <a:tr h="708660">
+                <a:tc>
+                  <a:txBody>
+                    <a:bodyPr/>
+                    <a:lstStyle/>
+                    <a:p>
+                      <a:r>
+                        <a:rPr lang="en-US"/>
+                        <a:t>textdirection=vert</a:t>
+                      </a:r>
+                    </a:p>
+                  </a:txBody>
+                  <a:tcPr>
+                    <a:lnL w="12700">
+                      <a:solidFill>
+                        <a:srgbClr val="808080"/>
+                      </a:solidFill>
+                      <a:prstDash val="solid"/>
+                    </a:lnL>
+                    <a:lnR w="12700">
+                      <a:solidFill>
+                        <a:srgbClr val="808080"/>
+                      </a:solidFill>
+                      <a:prstDash val="solid"/>
+                    </a:lnR>
+                    <a:lnT w="12700">
+                      <a:solidFill>
+                        <a:srgbClr val="808080"/>
+                      </a:solidFill>
+                      <a:prstDash val="solid"/>
+                    </a:lnT>
+                    <a:lnB w="12700">
+                      <a:solidFill>
+                        <a:srgbClr val="808080"/>
+                      </a:solidFill>
+                      <a:prstDash val="solid"/>
+                    </a:lnB>
+                  </a:tcPr>
+                </a:tc>
+                <a:tc>
+                  <a:txBody>
+                    <a:bodyPr/>
+                    <a:lstStyle/>
+                    <a:p>
+                      <a:r>
+                        <a:rPr lang="en-US"/>
+                        <a:t>Vertical text</a:t>
+                      </a:r>
+                    </a:p>
+                  </a:txBody>
+                  <a:tcPr vert="vert">
+                    <a:lnL w="12700">
+                      <a:solidFill>
+                        <a:srgbClr val="808080"/>
+                      </a:solidFill>
+                      <a:prstDash val="solid"/>
+                    </a:lnL>
+                    <a:lnR w="12700">
+                      <a:solidFill>
+                        <a:srgbClr val="808080"/>
+                      </a:solidFill>
+                      <a:prstDash val="solid"/>
+                    </a:lnR>
+                    <a:lnT w="12700">
+                      <a:solidFill>
+                        <a:srgbClr val="808080"/>
+                      </a:solidFill>
+                      <a:prstDash val="solid"/>
+                    </a:lnT>
+                    <a:lnB w="12700">
+                      <a:solidFill>
+                        <a:srgbClr val="808080"/>
+                      </a:solidFill>
+                      <a:prstDash val="solid"/>
+                    </a:lnB>
+                    <a:solidFill>
+                      <a:srgbClr val="FFE699"/>
+                    </a:solidFill>
+                  </a:tcPr>
+                </a:tc>
+              </a:tr>
+              <a:tr h="708660">
+                <a:tc>
+                  <a:txBody>
+                    <a:bodyPr/>
+                    <a:lstStyle/>
+                    <a:p>
+                      <a:r>
+                        <a:rPr lang="en-US"/>
+                        <a:t>direction=rtl</a:t>
+                      </a:r>
+                    </a:p>
+                  </a:txBody>
+                  <a:tcPr>
+                    <a:lnL w="12700">
+                      <a:solidFill>
+                        <a:srgbClr val="808080"/>
+                      </a:solidFill>
+                      <a:prstDash val="solid"/>
+                    </a:lnL>
+                    <a:lnR w="12700">
+                      <a:solidFill>
+                        <a:srgbClr val="808080"/>
+                      </a:solidFill>
+                      <a:prstDash val="solid"/>
+                    </a:lnR>
+                    <a:lnT w="12700">
+                      <a:solidFill>
+                        <a:srgbClr val="808080"/>
+                      </a:solidFill>
+                      <a:prstDash val="solid"/>
+                    </a:lnT>
+                    <a:lnB w="12700">
+                      <a:solidFill>
+                        <a:srgbClr val="808080"/>
+                      </a:solidFill>
+                      <a:prstDash val="solid"/>
+                    </a:lnB>
+                  </a:tcPr>
+                </a:tc>
+                <a:tc>
+                  <a:txBody>
+                    <a:bodyPr/>
+                    <a:lstStyle/>
+                    <a:p>
+                      <a:pPr rtl="1"/>
+                      <a:r>
+                        <a:rPr lang="en-US" sz="1800"/>
+                        <a:t>مرحبا</a:t>
+                      </a:r>
+                    </a:p>
+                  </a:txBody>
+                  <a:tcPr>
+                    <a:lnL w="12700">
+                      <a:solidFill>
+                        <a:srgbClr val="808080"/>
+                      </a:solidFill>
+                      <a:prstDash val="solid"/>
+                    </a:lnL>
+                    <a:lnR w="12700">
+                      <a:solidFill>
+                        <a:srgbClr val="808080"/>
+                      </a:solidFill>
+                      <a:prstDash val="solid"/>
+                    </a:lnR>
+                    <a:lnT w="12700">
+                      <a:solidFill>
+                        <a:srgbClr val="808080"/>
+                      </a:solidFill>
+                      <a:prstDash val="solid"/>
+                    </a:lnT>
+                    <a:lnB w="12700">
+                      <a:solidFill>
+                        <a:srgbClr val="808080"/>
+                      </a:solidFill>
+                      <a:prstDash val="solid"/>
+                    </a:lnB>
+                    <a:solidFill>
+                      <a:srgbClr val="A8DADC"/>
+                    </a:solidFill>
+                  </a:tcPr>
+                </a:tc>
+              </a:tr>
+              <a:tr h="708660">
+                <a:tc>
+                  <a:txBody>
+                    <a:bodyPr/>
+                    <a:lstStyle/>
+                    <a:p>
+                      <a:r>
+                        <a:rPr lang="en-US" sz="1100"/>
+                        <a:t>merge.right=1  bevel=circle  border.right=2pt solid E63946</a:t>
+                      </a:r>
+                    </a:p>
+                  </a:txBody>
+                  <a:tcPr>
+                    <a:lnL w="12700">
+                      <a:solidFill>
+                        <a:srgbClr val="808080"/>
+                      </a:solidFill>
+                      <a:prstDash val="solid"/>
+                    </a:lnL>
+                    <a:lnR w="12700">
+                      <a:solidFill>
+                        <a:srgbClr val="808080"/>
+                      </a:solidFill>
+                      <a:prstDash val="solid"/>
+                    </a:lnR>
+                    <a:lnT w="12700">
+                      <a:solidFill>
+                        <a:srgbClr val="808080"/>
+                      </a:solidFill>
+                      <a:prstDash val="solid"/>
+                    </a:lnT>
+                    <a:lnB w="12700">
+                      <a:solidFill>
+                        <a:srgbClr val="808080"/>
+                      </a:solidFill>
+                      <a:prstDash val="solid"/>
+                    </a:lnB>
+                    <a:solidFill>
+                      <a:srgbClr val="F4A261"/>
+                    </a:solidFill>
+                  </a:tcPr>
+                </a:tc>
+                <a:tc>
+                  <a:txBody>
+                    <a:bodyPr/>
+                    <a:lstStyle/>
+                    <a:p>
+                      <a:r>
+                        <a:rPr lang="en-US"/>
+                        <a:t>Merged, beveled, custom right border.</a:t>
+                      </a:r>
+                    </a:p>
+                  </a:txBody>
+                  <a:tcPr>
+                    <a:lnL w="12700">
+                      <a:solidFill>
+                        <a:srgbClr val="808080"/>
+                      </a:solidFill>
+                      <a:prstDash val="solid"/>
+                    </a:lnL>
+                    <a:lnR w="25400">
+                      <a:solidFill>
+                        <a:srgbClr val="E63946"/>
+                      </a:solidFill>
+                      <a:prstDash val="solid"/>
+                    </a:lnR>
+                    <a:lnT w="12700">
+                      <a:solidFill>
+                        <a:srgbClr val="808080"/>
+                      </a:solidFill>
+                      <a:prstDash val="solid"/>
+                    </a:lnT>
+                    <a:lnB w="12700">
+                      <a:solidFill>
+                        <a:srgbClr val="808080"/>
+                      </a:solidFill>
+                      <a:prstDash val="solid"/>
+                    </a:lnB>
+                    <a:cell3D>
+                      <a:bevel prst="circle"/>
+                    </a:cell3D>
+                    <a:solidFill>
+                      <a:srgbClr val="F4A261"/>
+                    </a:solidFill>
                   </a:tcPr>
                 </a:tc>
               </a:tr>
